--- a/deliverables/03-AegisBank-答辩PPT.pptx
+++ b/deliverables/03-AegisBank-答辩PPT.pptx
@@ -725,7 +725,7 @@
           <a:lstStyle/>
           <a:p>
             <a:r>
-              <a:t>【7:45-8:25】数字要讲清楚来源：48 工具、49 接口、144 后端测试、22 前端测试、29 项六场景回归、门禁五阶段。强调测试不是摆设：审计链、注入、撤权、回滚都有自动化覆盖。</a:t>
+              <a:t>【7:45-8:25】数字要讲清楚来源：50 工具、49 接口、187 后端测试、22 前端测试、29 项六场景回归、门禁五阶段。强调测试不是摆设：审计链、注入、撤权、回滚都有自动化覆盖。</a:t>
             </a:r>
           </a:p>
         </p:txBody>
@@ -4696,7 +4696,7 @@
                 <a:latin typeface="Microsoft YaHei"/>
                 <a:ea typeface="Microsoft YaHei"/>
               </a:rPr>
-              <a:t>github.com/LQZ5885/aegisbank   ·   MIT   ·   6 场景 / 48 工具 / 49 接口 / 144 测试</a:t>
+              <a:t>github.com/LQZ5885/aegisbank   ·   MIT   ·   6 场景 / 50 工具 / 49 接口 / 187 测试</a:t>
             </a:r>
           </a:p>
         </p:txBody>
@@ -6507,7 +6507,7 @@
                 <a:latin typeface="Microsoft YaHei"/>
                 <a:ea typeface="Microsoft YaHei"/>
               </a:rPr>
-              <a:t>48</a:t>
+              <a:t>50</a:t>
             </a:r>
           </a:p>
         </p:txBody>
@@ -6579,7 +6579,7 @@
                 <a:latin typeface="Microsoft YaHei"/>
                 <a:ea typeface="Microsoft YaHei"/>
               </a:rPr>
-              <a:t>核心 9 + 场景 25 + 2A 14</a:t>
+              <a:t>核心 10 + 场景 26 + 2A 14</a:t>
             </a:r>
           </a:p>
         </p:txBody>
@@ -6813,7 +6813,7 @@
                 <a:latin typeface="Microsoft YaHei"/>
                 <a:ea typeface="Microsoft YaHei"/>
               </a:rPr>
-              <a:t>144</a:t>
+              <a:t>187</a:t>
             </a:r>
           </a:p>
         </p:txBody>
@@ -6885,7 +6885,7 @@
                 <a:latin typeface="Microsoft YaHei"/>
                 <a:ea typeface="Microsoft YaHei"/>
               </a:rPr>
-              <a:t>15 个测试文件</a:t>
+              <a:t>16 个测试文件</a:t>
             </a:r>
           </a:p>
         </p:txBody>
@@ -6966,7 +6966,7 @@
                 <a:latin typeface="Microsoft YaHei"/>
                 <a:ea typeface="Microsoft YaHei"/>
               </a:rPr>
-              <a:t>22</a:t>
+              <a:t>53</a:t>
             </a:r>
           </a:p>
         </p:txBody>
@@ -7038,7 +7038,7 @@
                 <a:latin typeface="Microsoft YaHei"/>
                 <a:ea typeface="Microsoft YaHei"/>
               </a:rPr>
-              <a:t>3 个 Vitest 文件</a:t>
+              <a:t>7 个 Vitest 文件</a:t>
             </a:r>
           </a:p>
         </p:txBody>
@@ -9050,7 +9050,7 @@
                 <a:latin typeface="Microsoft YaHei"/>
                 <a:ea typeface="Microsoft YaHei"/>
               </a:rPr>
-              <a:t>144 项后端测试 · 29 项六场景回归</a:t>
+              <a:t>187 项后端测试 · 29 项六场景回归</a:t>
             </a:r>
           </a:p>
           <a:p>
@@ -10771,7 +10771,7 @@
                 <a:latin typeface="Microsoft YaHei"/>
                 <a:ea typeface="Microsoft YaHei"/>
               </a:rPr>
-              <a:t>Mock Bank Core 工具（48 个）</a:t>
+              <a:t>Mock Bank Core 工具（50 个）</a:t>
             </a:r>
           </a:p>
         </p:txBody>
@@ -14709,7 +14709,7 @@
                 <a:latin typeface="Microsoft YaHei"/>
                 <a:ea typeface="Microsoft YaHei"/>
               </a:rPr>
-              <a:t>• 27 条补偿规格：15 可逆 / 12 不可逆</a:t>
+              <a:t>• 28 条补偿规格：15 可逆 / 13 不可逆</a:t>
             </a:r>
           </a:p>
           <a:p>
